--- a/chapter10/parts/part-04-correlation-bootstrapping-regression/clip.pptx
+++ b/chapter10/parts/part-04-correlation-bootstrapping-regression/clip.pptx
@@ -4400,10 +4400,12 @@
           </a:bodyPr>
           <a:lstStyle/>
           <a:p>
-            <a:pPr>
+            <a:pPr lvl="0" marL="457200" indent="-228600">
+              <a:buFont typeface="Calibri"/>
               <a:spcAft>
                 <a:spcPts val="1000"/>
               </a:spcAft>
+              <a:buSzPct val="100000"/>
               <a:buChar char="•"/>
               <a:lnSpc>
                 <a:spcPts val="2200"/>
@@ -4420,10 +4422,12 @@
             </a:r>
           </a:p>
           <a:p>
-            <a:pPr>
+            <a:pPr lvl="0" marL="457200" indent="-228600">
+              <a:buFont typeface="Calibri"/>
               <a:spcAft>
                 <a:spcPts val="1000"/>
               </a:spcAft>
+              <a:buSzPct val="100000"/>
               <a:buChar char="•"/>
               <a:lnSpc>
                 <a:spcPts val="2200"/>
@@ -4559,10 +4563,12 @@
           </a:bodyPr>
           <a:lstStyle/>
           <a:p>
-            <a:pPr>
+            <a:pPr lvl="0" marL="457200" indent="-228600">
+              <a:buFont typeface="Calibri"/>
               <a:spcAft>
                 <a:spcPts val="1000"/>
               </a:spcAft>
+              <a:buSzPct val="100000"/>
               <a:buChar char="•"/>
               <a:lnSpc>
                 <a:spcPts val="2200"/>
@@ -4579,10 +4585,12 @@
             </a:r>
           </a:p>
           <a:p>
-            <a:pPr>
+            <a:pPr lvl="0" marL="457200" indent="-228600">
+              <a:buFont typeface="Calibri"/>
               <a:spcAft>
                 <a:spcPts val="1000"/>
               </a:spcAft>
+              <a:buSzPct val="100000"/>
               <a:buChar char="•"/>
               <a:lnSpc>
                 <a:spcPts val="2200"/>
@@ -4599,10 +4607,12 @@
             </a:r>
           </a:p>
           <a:p>
-            <a:pPr>
+            <a:pPr lvl="0" marL="457200" indent="-228600">
+              <a:buFont typeface="Calibri"/>
               <a:spcAft>
                 <a:spcPts val="1000"/>
               </a:spcAft>
+              <a:buSzPct val="100000"/>
               <a:buChar char="•"/>
               <a:lnSpc>
                 <a:spcPts val="2200"/>
@@ -4619,10 +4629,12 @@
             </a:r>
           </a:p>
           <a:p>
-            <a:pPr>
+            <a:pPr lvl="0" marL="457200" indent="-228600">
+              <a:buFont typeface="Calibri"/>
               <a:spcAft>
                 <a:spcPts val="1000"/>
               </a:spcAft>
+              <a:buSzPct val="100000"/>
               <a:buChar char="•"/>
               <a:lnSpc>
                 <a:spcPts val="2200"/>
@@ -4639,10 +4651,12 @@
             </a:r>
           </a:p>
           <a:p>
-            <a:pPr>
+            <a:pPr lvl="0" marL="457200" indent="-228600">
+              <a:buFont typeface="Calibri"/>
               <a:spcAft>
                 <a:spcPts val="1000"/>
               </a:spcAft>
+              <a:buSzPct val="100000"/>
               <a:buChar char="•"/>
               <a:lnSpc>
                 <a:spcPts val="2200"/>
@@ -5241,10 +5255,12 @@
           </a:bodyPr>
           <a:lstStyle/>
           <a:p>
-            <a:pPr>
+            <a:pPr lvl="0" marL="457200" indent="-228600">
+              <a:buFont typeface="Calibri"/>
               <a:spcAft>
                 <a:spcPts val="1000"/>
               </a:spcAft>
+              <a:buSzPct val="100000"/>
               <a:buChar char="•"/>
               <a:lnSpc>
                 <a:spcPts val="2200"/>
@@ -5261,10 +5277,12 @@
             </a:r>
           </a:p>
           <a:p>
-            <a:pPr>
+            <a:pPr lvl="0" marL="457200" indent="-228600">
+              <a:buFont typeface="Calibri"/>
               <a:spcAft>
                 <a:spcPts val="1000"/>
               </a:spcAft>
+              <a:buSzPct val="100000"/>
               <a:buChar char="•"/>
               <a:lnSpc>
                 <a:spcPts val="2200"/>
@@ -5281,10 +5299,12 @@
             </a:r>
           </a:p>
           <a:p>
-            <a:pPr>
+            <a:pPr lvl="0" marL="457200" indent="-228600">
+              <a:buFont typeface="Calibri"/>
               <a:spcAft>
                 <a:spcPts val="1000"/>
               </a:spcAft>
+              <a:buSzPct val="100000"/>
               <a:buChar char="•"/>
               <a:lnSpc>
                 <a:spcPts val="2200"/>
@@ -5420,10 +5440,12 @@
           </a:bodyPr>
           <a:lstStyle/>
           <a:p>
-            <a:pPr>
+            <a:pPr lvl="0" marL="457200" indent="-228600">
+              <a:buFont typeface="Calibri"/>
               <a:spcAft>
                 <a:spcPts val="1000"/>
               </a:spcAft>
+              <a:buSzPct val="100000"/>
               <a:buChar char="•"/>
               <a:lnSpc>
                 <a:spcPts val="2200"/>
@@ -5440,10 +5462,12 @@
             </a:r>
           </a:p>
           <a:p>
-            <a:pPr>
+            <a:pPr lvl="0" marL="457200" indent="-228600">
+              <a:buFont typeface="Calibri"/>
               <a:spcAft>
                 <a:spcPts val="1000"/>
               </a:spcAft>
+              <a:buSzPct val="100000"/>
               <a:buChar char="•"/>
               <a:lnSpc>
                 <a:spcPts val="2200"/>
@@ -5579,10 +5603,12 @@
           </a:bodyPr>
           <a:lstStyle/>
           <a:p>
-            <a:pPr>
+            <a:pPr lvl="0" marL="457200" indent="-228600">
+              <a:buFont typeface="Calibri"/>
               <a:spcAft>
                 <a:spcPts val="1000"/>
               </a:spcAft>
+              <a:buSzPct val="100000"/>
               <a:buChar char="•"/>
               <a:lnSpc>
                 <a:spcPts val="2200"/>
@@ -5718,10 +5744,12 @@
           </a:bodyPr>
           <a:lstStyle/>
           <a:p>
-            <a:pPr>
+            <a:pPr lvl="0" marL="457200" indent="-228600">
+              <a:buFont typeface="Calibri"/>
               <a:spcAft>
                 <a:spcPts val="1000"/>
               </a:spcAft>
+              <a:buSzPct val="100000"/>
               <a:buChar char="•"/>
               <a:lnSpc>
                 <a:spcPts val="2200"/>
@@ -5738,10 +5766,12 @@
             </a:r>
           </a:p>
           <a:p>
-            <a:pPr>
+            <a:pPr lvl="0" marL="457200" indent="-228600">
+              <a:buFont typeface="Calibri"/>
               <a:spcAft>
                 <a:spcPts val="1000"/>
               </a:spcAft>
+              <a:buSzPct val="100000"/>
               <a:buChar char="•"/>
               <a:lnSpc>
                 <a:spcPts val="2200"/>
@@ -5758,10 +5788,12 @@
             </a:r>
           </a:p>
           <a:p>
-            <a:pPr>
+            <a:pPr lvl="0" marL="457200" indent="-228600">
+              <a:buFont typeface="Calibri"/>
               <a:spcAft>
                 <a:spcPts val="1000"/>
               </a:spcAft>
+              <a:buSzPct val="100000"/>
               <a:buChar char="•"/>
               <a:lnSpc>
                 <a:spcPts val="2200"/>
@@ -5778,10 +5810,12 @@
             </a:r>
           </a:p>
           <a:p>
-            <a:pPr>
+            <a:pPr lvl="0" marL="457200" indent="-228600">
+              <a:buFont typeface="Calibri"/>
               <a:spcAft>
                 <a:spcPts val="1000"/>
               </a:spcAft>
+              <a:buSzPct val="100000"/>
               <a:buChar char="•"/>
               <a:lnSpc>
                 <a:spcPts val="2200"/>
@@ -5917,10 +5951,12 @@
           </a:bodyPr>
           <a:lstStyle/>
           <a:p>
-            <a:pPr>
+            <a:pPr lvl="0" marL="457200" indent="-228600">
+              <a:buFont typeface="Calibri"/>
               <a:spcAft>
                 <a:spcPts val="1000"/>
               </a:spcAft>
+              <a:buSzPct val="100000"/>
               <a:buChar char="•"/>
               <a:lnSpc>
                 <a:spcPts val="2200"/>
@@ -5937,10 +5973,12 @@
             </a:r>
           </a:p>
           <a:p>
-            <a:pPr>
+            <a:pPr lvl="0" marL="457200" indent="-228600">
+              <a:buFont typeface="Calibri"/>
               <a:spcAft>
                 <a:spcPts val="1000"/>
               </a:spcAft>
+              <a:buSzPct val="100000"/>
               <a:buChar char="•"/>
               <a:lnSpc>
                 <a:spcPts val="2200"/>
@@ -5957,10 +5995,12 @@
             </a:r>
           </a:p>
           <a:p>
-            <a:pPr>
+            <a:pPr lvl="0" marL="457200" indent="-228600">
+              <a:buFont typeface="Calibri"/>
               <a:spcAft>
                 <a:spcPts val="1000"/>
               </a:spcAft>
+              <a:buSzPct val="100000"/>
               <a:buChar char="•"/>
               <a:lnSpc>
                 <a:spcPts val="2200"/>
@@ -5977,10 +6017,12 @@
             </a:r>
           </a:p>
           <a:p>
-            <a:pPr>
+            <a:pPr lvl="0" marL="457200" indent="-228600">
+              <a:buFont typeface="Calibri"/>
               <a:spcAft>
                 <a:spcPts val="1000"/>
               </a:spcAft>
+              <a:buSzPct val="100000"/>
               <a:buChar char="•"/>
               <a:lnSpc>
                 <a:spcPts val="2200"/>
@@ -5997,10 +6039,12 @@
             </a:r>
           </a:p>
           <a:p>
-            <a:pPr>
+            <a:pPr lvl="0" marL="457200" indent="-228600">
+              <a:buFont typeface="Calibri"/>
               <a:spcAft>
                 <a:spcPts val="1000"/>
               </a:spcAft>
+              <a:buSzPct val="100000"/>
               <a:buChar char="•"/>
               <a:lnSpc>
                 <a:spcPts val="2200"/>
@@ -6599,10 +6643,12 @@
           </a:bodyPr>
           <a:lstStyle/>
           <a:p>
-            <a:pPr>
+            <a:pPr lvl="0" marL="457200" indent="-228600">
+              <a:buFont typeface="Calibri"/>
               <a:spcAft>
                 <a:spcPts val="1000"/>
               </a:spcAft>
+              <a:buSzPct val="100000"/>
               <a:buChar char="•"/>
               <a:lnSpc>
                 <a:spcPts val="2200"/>
@@ -6619,10 +6665,12 @@
             </a:r>
           </a:p>
           <a:p>
-            <a:pPr>
+            <a:pPr lvl="0" marL="457200" indent="-228600">
+              <a:buFont typeface="Calibri"/>
               <a:spcAft>
                 <a:spcPts val="1000"/>
               </a:spcAft>
+              <a:buSzPct val="100000"/>
               <a:buChar char="•"/>
               <a:lnSpc>
                 <a:spcPts val="2200"/>
@@ -6758,10 +6806,12 @@
           </a:bodyPr>
           <a:lstStyle/>
           <a:p>
-            <a:pPr>
+            <a:pPr lvl="0" marL="457200" indent="-228600">
+              <a:buFont typeface="Calibri"/>
               <a:spcAft>
                 <a:spcPts val="1000"/>
               </a:spcAft>
+              <a:buSzPct val="100000"/>
               <a:buChar char="•"/>
               <a:lnSpc>
                 <a:spcPts val="2200"/>
@@ -6778,10 +6828,12 @@
             </a:r>
           </a:p>
           <a:p>
-            <a:pPr>
+            <a:pPr lvl="0" marL="457200" indent="-228600">
+              <a:buFont typeface="Calibri"/>
               <a:spcAft>
                 <a:spcPts val="1000"/>
               </a:spcAft>
+              <a:buSzPct val="100000"/>
               <a:buChar char="•"/>
               <a:lnSpc>
                 <a:spcPts val="2200"/>
@@ -6798,10 +6850,12 @@
             </a:r>
           </a:p>
           <a:p>
-            <a:pPr>
+            <a:pPr lvl="0" marL="457200" indent="-228600">
+              <a:buFont typeface="Calibri"/>
               <a:spcAft>
                 <a:spcPts val="1000"/>
               </a:spcAft>
+              <a:buSzPct val="100000"/>
               <a:buChar char="•"/>
               <a:lnSpc>
                 <a:spcPts val="2200"/>
@@ -6937,10 +6991,12 @@
           </a:bodyPr>
           <a:lstStyle/>
           <a:p>
-            <a:pPr>
+            <a:pPr lvl="0" marL="457200" indent="-228600">
+              <a:buFont typeface="Calibri"/>
               <a:spcAft>
                 <a:spcPts val="1000"/>
               </a:spcAft>
+              <a:buSzPct val="100000"/>
               <a:buChar char="•"/>
               <a:lnSpc>
                 <a:spcPts val="2200"/>
@@ -6957,10 +7013,12 @@
             </a:r>
           </a:p>
           <a:p>
-            <a:pPr>
+            <a:pPr lvl="0" marL="457200" indent="-228600">
+              <a:buFont typeface="Calibri"/>
               <a:spcAft>
                 <a:spcPts val="1000"/>
               </a:spcAft>
+              <a:buSzPct val="100000"/>
               <a:buChar char="•"/>
               <a:lnSpc>
                 <a:spcPts val="2200"/>
@@ -6977,10 +7035,12 @@
             </a:r>
           </a:p>
           <a:p>
-            <a:pPr>
+            <a:pPr lvl="0" marL="457200" indent="-228600">
+              <a:buFont typeface="Calibri"/>
               <a:spcAft>
                 <a:spcPts val="1000"/>
               </a:spcAft>
+              <a:buSzPct val="100000"/>
               <a:buChar char="•"/>
               <a:lnSpc>
                 <a:spcPts val="2200"/>
@@ -6997,10 +7057,12 @@
             </a:r>
           </a:p>
           <a:p>
-            <a:pPr>
+            <a:pPr lvl="0" marL="457200" indent="-228600">
+              <a:buFont typeface="Calibri"/>
               <a:spcAft>
                 <a:spcPts val="1000"/>
               </a:spcAft>
+              <a:buSzPct val="100000"/>
               <a:buChar char="•"/>
               <a:lnSpc>
                 <a:spcPts val="2200"/>
@@ -7017,10 +7079,12 @@
             </a:r>
           </a:p>
           <a:p>
-            <a:pPr>
+            <a:pPr lvl="0" marL="457200" indent="-228600">
+              <a:buFont typeface="Calibri"/>
               <a:spcAft>
                 <a:spcPts val="1000"/>
               </a:spcAft>
+              <a:buSzPct val="100000"/>
               <a:buChar char="•"/>
               <a:lnSpc>
                 <a:spcPts val="2200"/>
